--- a/modulo-01/01.04 - Lendo Dados do Banco de Dados (ABAP SQL)/01.04_Lendo_Dados_do_Banco_de_Dados_(ABAP SQL).pptx
+++ b/modulo-01/01.04 - Lendo Dados do Banco de Dados (ABAP SQL)/01.04_Lendo_Dados_do_Banco_de_Dados_(ABAP SQL).pptx
@@ -8032,7 +8032,7 @@
         </p:blipFill>
         <p:spPr>
           <a:xfrm>
-            <a:off x="850392" y="3168396"/>
+            <a:off x="6511900" y="3168396"/>
             <a:ext cx="256032" cy="256032"/>
           </a:xfrm>
           <a:prstGeom prst="rect">
@@ -8056,7 +8056,7 @@
         </p:blipFill>
         <p:spPr>
           <a:xfrm>
-            <a:off x="3681146" y="3168396"/>
+            <a:off x="850392" y="3168396"/>
             <a:ext cx="256032" cy="256032"/>
           </a:xfrm>
           <a:prstGeom prst="rect">
@@ -8080,7 +8080,7 @@
         </p:blipFill>
         <p:spPr>
           <a:xfrm>
-            <a:off x="9342653" y="3168396"/>
+            <a:off x="3681146" y="3168396"/>
             <a:ext cx="256032" cy="256032"/>
           </a:xfrm>
           <a:prstGeom prst="rect">
@@ -8104,7 +8104,7 @@
         </p:blipFill>
         <p:spPr>
           <a:xfrm>
-            <a:off x="6511900" y="3168396"/>
+            <a:off x="9342653" y="3168396"/>
             <a:ext cx="256032" cy="256032"/>
           </a:xfrm>
           <a:prstGeom prst="rect">
@@ -9332,7 +9332,7 @@
         </p:blipFill>
         <p:spPr>
           <a:xfrm>
-            <a:off x="6562192" y="2630043"/>
+            <a:off x="877824" y="2630043"/>
             <a:ext cx="256032" cy="256032"/>
           </a:xfrm>
           <a:prstGeom prst="rect">
@@ -9356,8 +9356,8 @@
         </p:blipFill>
         <p:spPr>
           <a:xfrm>
-            <a:off x="877824" y="2630043"/>
-            <a:ext cx="256032" cy="256032"/>
+            <a:off x="749808" y="5124069"/>
+            <a:ext cx="310896" cy="310896"/>
           </a:xfrm>
           <a:prstGeom prst="rect">
             <a:avLst/>
@@ -9380,8 +9380,8 @@
         </p:blipFill>
         <p:spPr>
           <a:xfrm>
-            <a:off x="749808" y="5124069"/>
-            <a:ext cx="310896" cy="310896"/>
+            <a:off x="6562192" y="2630043"/>
+            <a:ext cx="256032" cy="256032"/>
           </a:xfrm>
           <a:prstGeom prst="rect">
             <a:avLst/>
@@ -10092,7 +10092,7 @@
         </p:blipFill>
         <p:spPr>
           <a:xfrm>
-            <a:off x="6355080" y="1965960"/>
+            <a:off x="822960" y="1965960"/>
             <a:ext cx="256032" cy="256032"/>
           </a:xfrm>
           <a:prstGeom prst="rect">
@@ -10116,7 +10116,7 @@
         </p:blipFill>
         <p:spPr>
           <a:xfrm>
-            <a:off x="822960" y="2926080"/>
+            <a:off x="6355080" y="1965960"/>
             <a:ext cx="256032" cy="256032"/>
           </a:xfrm>
           <a:prstGeom prst="rect">
@@ -10140,7 +10140,7 @@
         </p:blipFill>
         <p:spPr>
           <a:xfrm>
-            <a:off x="822960" y="1965960"/>
+            <a:off x="6355080" y="2926080"/>
             <a:ext cx="256032" cy="256032"/>
           </a:xfrm>
           <a:prstGeom prst="rect">
@@ -10164,7 +10164,7 @@
         </p:blipFill>
         <p:spPr>
           <a:xfrm>
-            <a:off x="6355080" y="2926080"/>
+            <a:off x="822960" y="3886200"/>
             <a:ext cx="256032" cy="256032"/>
           </a:xfrm>
           <a:prstGeom prst="rect">
@@ -10188,7 +10188,7 @@
         </p:blipFill>
         <p:spPr>
           <a:xfrm>
-            <a:off x="822960" y="3886200"/>
+            <a:off x="822960" y="2926080"/>
             <a:ext cx="256032" cy="256032"/>
           </a:xfrm>
           <a:prstGeom prst="rect">
@@ -11800,7 +11800,7 @@
         </p:blipFill>
         <p:spPr>
           <a:xfrm>
-            <a:off x="5455768" y="1847088"/>
+            <a:off x="2636444" y="1847088"/>
             <a:ext cx="347472" cy="347472"/>
           </a:xfrm>
           <a:prstGeom prst="rect">
@@ -11824,7 +11824,7 @@
         </p:blipFill>
         <p:spPr>
           <a:xfrm>
-            <a:off x="2636444" y="1847088"/>
+            <a:off x="5455768" y="1847088"/>
             <a:ext cx="347472" cy="347472"/>
           </a:xfrm>
           <a:prstGeom prst="rect">
@@ -11872,7 +11872,7 @@
         </p:blipFill>
         <p:spPr>
           <a:xfrm>
-            <a:off x="2636444" y="3858768"/>
+            <a:off x="5455768" y="3858768"/>
             <a:ext cx="347472" cy="347472"/>
           </a:xfrm>
           <a:prstGeom prst="rect">
@@ -11896,7 +11896,7 @@
         </p:blipFill>
         <p:spPr>
           <a:xfrm>
-            <a:off x="5455768" y="3858768"/>
+            <a:off x="2636444" y="3858768"/>
             <a:ext cx="347472" cy="347472"/>
           </a:xfrm>
           <a:prstGeom prst="rect">
